--- a/slides/APL_Bootcamp-part-4.pptx
+++ b/slides/APL_Bootcamp-part-4.pptx
@@ -5,10 +5,10 @@
     <p:sldMasterId id="2147483648" r:id="rId1"/>
   </p:sldMasterIdLst>
   <p:notesMasterIdLst>
-    <p:notesMasterId r:id="rId82"/>
+    <p:notesMasterId r:id="rId83"/>
   </p:notesMasterIdLst>
   <p:handoutMasterIdLst>
-    <p:handoutMasterId r:id="rId83"/>
+    <p:handoutMasterId r:id="rId84"/>
   </p:handoutMasterIdLst>
   <p:sldIdLst>
     <p:sldId id="257" r:id="rId2"/>
@@ -72,50 +72,51 @@
     <p:sldId id="768" r:id="rId60"/>
     <p:sldId id="769" r:id="rId61"/>
     <p:sldId id="770" r:id="rId62"/>
-    <p:sldId id="772" r:id="rId63"/>
-    <p:sldId id="773" r:id="rId64"/>
-    <p:sldId id="774" r:id="rId65"/>
-    <p:sldId id="775" r:id="rId66"/>
-    <p:sldId id="776" r:id="rId67"/>
-    <p:sldId id="777" r:id="rId68"/>
-    <p:sldId id="778" r:id="rId69"/>
-    <p:sldId id="779" r:id="rId70"/>
-    <p:sldId id="780" r:id="rId71"/>
-    <p:sldId id="781" r:id="rId72"/>
-    <p:sldId id="782" r:id="rId73"/>
-    <p:sldId id="783" r:id="rId74"/>
-    <p:sldId id="784" r:id="rId75"/>
-    <p:sldId id="785" r:id="rId76"/>
-    <p:sldId id="1029" r:id="rId77"/>
-    <p:sldId id="1030" r:id="rId78"/>
-    <p:sldId id="1031" r:id="rId79"/>
-    <p:sldId id="1028" r:id="rId80"/>
-    <p:sldId id="1032" r:id="rId81"/>
+    <p:sldId id="1042" r:id="rId63"/>
+    <p:sldId id="772" r:id="rId64"/>
+    <p:sldId id="773" r:id="rId65"/>
+    <p:sldId id="774" r:id="rId66"/>
+    <p:sldId id="775" r:id="rId67"/>
+    <p:sldId id="776" r:id="rId68"/>
+    <p:sldId id="777" r:id="rId69"/>
+    <p:sldId id="778" r:id="rId70"/>
+    <p:sldId id="779" r:id="rId71"/>
+    <p:sldId id="780" r:id="rId72"/>
+    <p:sldId id="781" r:id="rId73"/>
+    <p:sldId id="782" r:id="rId74"/>
+    <p:sldId id="783" r:id="rId75"/>
+    <p:sldId id="784" r:id="rId76"/>
+    <p:sldId id="785" r:id="rId77"/>
+    <p:sldId id="1029" r:id="rId78"/>
+    <p:sldId id="1030" r:id="rId79"/>
+    <p:sldId id="1031" r:id="rId80"/>
+    <p:sldId id="1028" r:id="rId81"/>
+    <p:sldId id="1032" r:id="rId82"/>
   </p:sldIdLst>
   <p:sldSz cx="9144000" cy="5143500" type="screen16x9"/>
   <p:notesSz cx="6858000" cy="9144000"/>
   <p:embeddedFontLst>
     <p:embeddedFont>
       <p:font typeface="APL385 Unicode" panose="020B0709000202000203" pitchFamily="49" charset="0"/>
-      <p:regular r:id="rId84"/>
+      <p:regular r:id="rId85"/>
     </p:embeddedFont>
     <p:embeddedFont>
       <p:font typeface="Sarabun" panose="00000500000000000000" pitchFamily="2" charset="-34"/>
-      <p:regular r:id="rId85"/>
-      <p:bold r:id="rId86"/>
-      <p:italic r:id="rId87"/>
-      <p:boldItalic r:id="rId88"/>
+      <p:regular r:id="rId86"/>
+      <p:bold r:id="rId87"/>
+      <p:italic r:id="rId88"/>
+      <p:boldItalic r:id="rId89"/>
     </p:embeddedFont>
     <p:embeddedFont>
       <p:font typeface="Times" panose="02020603050405020304" pitchFamily="18" charset="0"/>
-      <p:regular r:id="rId89"/>
-      <p:bold r:id="rId90"/>
-      <p:italic r:id="rId91"/>
-      <p:boldItalic r:id="rId92"/>
+      <p:regular r:id="rId90"/>
+      <p:bold r:id="rId91"/>
+      <p:italic r:id="rId92"/>
+      <p:boldItalic r:id="rId93"/>
     </p:embeddedFont>
     <p:embeddedFont>
       <p:font typeface="Wingdings 2" panose="05020102010507070707" pitchFamily="18" charset="2"/>
-      <p:regular r:id="rId93"/>
+      <p:regular r:id="rId94"/>
     </p:embeddedFont>
   </p:embeddedFontLst>
   <p:defaultTextStyle>
@@ -332,7 +333,7 @@
               <a:rPr lang="en-GB" smtClean="0">
                 <a:latin typeface="Sarabun" panose="00000500000000000000" pitchFamily="2" charset="-34"/>
               </a:rPr>
-              <a:t>10/08/2025</a:t>
+              <a:t>20/08/2025</a:t>
             </a:fld>
             <a:endParaRPr lang="en-GB" dirty="0">
               <a:latin typeface="Sarabun" panose="00000500000000000000" pitchFamily="2" charset="-34"/>
@@ -510,7 +511,7 @@
             <a:fld id="{CDEAEF8A-5BB8-41C8-B8C2-160617C17EF4}" type="datetimeFigureOut">
               <a:rPr lang="en-GB" smtClean="0"/>
               <a:pPr/>
-              <a:t>10/08/2025</a:t>
+              <a:t>20/08/2025</a:t>
             </a:fld>
             <a:endParaRPr lang="en-GB" dirty="0"/>
           </a:p>
@@ -15717,7 +15718,7 @@
               <a:rPr lang="en-US" dirty="0">
                 <a:latin typeface="APL385 Unicode" panose="020B0709000202000203" pitchFamily="49" charset="0"/>
               </a:rPr>
-              <a:t>     A← </a:t>
+              <a:t>     A ← </a:t>
             </a:r>
             <a:r>
               <a:rPr lang="en-US" dirty="0">
@@ -16913,6 +16914,360 @@
         <p:cNvPr id="1" name="">
           <a:extLst>
             <a:ext uri="{FF2B5EF4-FFF2-40B4-BE49-F238E27FC236}">
+              <a16:creationId xmlns:a16="http://schemas.microsoft.com/office/drawing/2014/main" id="{7F4EADF9-8532-6583-AA61-2E5A5C0B022E}"/>
+            </a:ext>
+          </a:extLst>
+        </p:cNvPr>
+        <p:cNvGrpSpPr/>
+        <p:nvPr/>
+      </p:nvGrpSpPr>
+      <p:grpSpPr>
+        <a:xfrm>
+          <a:off x="0" y="0"/>
+          <a:ext cx="0" cy="0"/>
+          <a:chOff x="0" y="0"/>
+          <a:chExt cx="0" cy="0"/>
+        </a:xfrm>
+      </p:grpSpPr>
+      <p:sp>
+        <p:nvSpPr>
+          <p:cNvPr id="2" name="Content Placeholder 1">
+            <a:extLst>
+              <a:ext uri="{FF2B5EF4-FFF2-40B4-BE49-F238E27FC236}">
+                <a16:creationId xmlns:a16="http://schemas.microsoft.com/office/drawing/2014/main" id="{47806B1B-B489-A9CA-73D1-2DF92BDD5046}"/>
+              </a:ext>
+            </a:extLst>
+          </p:cNvPr>
+          <p:cNvSpPr>
+            <a:spLocks noGrp="1"/>
+          </p:cNvSpPr>
+          <p:nvPr>
+            <p:ph idx="1"/>
+          </p:nvPr>
+        </p:nvSpPr>
+        <p:spPr/>
+        <p:txBody>
+          <a:bodyPr>
+            <a:normAutofit fontScale="85000" lnSpcReduction="20000"/>
+          </a:bodyPr>
+          <a:lstStyle/>
+          <a:p>
+            <a:pPr>
+              <a:buNone/>
+              <a:defRPr/>
+            </a:pPr>
+            <a:r>
+              <a:rPr lang="en-US" b="1" dirty="0"/>
+              <a:t>Drop</a:t>
+            </a:r>
+            <a:r>
+              <a:rPr lang="en-US" dirty="0"/>
+              <a:t>:   </a:t>
+            </a:r>
+            <a:r>
+              <a:rPr lang="en-US" dirty="0" err="1">
+                <a:solidFill>
+                  <a:srgbClr val="FF6600"/>
+                </a:solidFill>
+                <a:latin typeface="APL385 Unicode" panose="020B0709000202000203" pitchFamily="49" charset="0"/>
+              </a:rPr>
+              <a:t>n</a:t>
+            </a:r>
+            <a:r>
+              <a:rPr lang="en-US" dirty="0" err="1">
+                <a:latin typeface="APL385 Unicode" panose="020B0709000202000203" pitchFamily="49" charset="0"/>
+              </a:rPr>
+              <a:t>↓A</a:t>
+            </a:r>
+            <a:r>
+              <a:rPr lang="en-US" dirty="0"/>
+              <a:t> </a:t>
+            </a:r>
+          </a:p>
+          <a:p>
+            <a:pPr>
+              <a:buNone/>
+              <a:defRPr/>
+            </a:pPr>
+            <a:r>
+              <a:rPr lang="en-US" i="1" dirty="0"/>
+              <a:t>Drop</a:t>
+            </a:r>
+            <a:r>
+              <a:rPr lang="en-US" dirty="0"/>
+              <a:t> drops the </a:t>
+            </a:r>
+            <a:r>
+              <a:rPr lang="en-US" b="1" dirty="0"/>
+              <a:t>first</a:t>
+            </a:r>
+            <a:r>
+              <a:rPr lang="en-US" dirty="0">
+                <a:solidFill>
+                  <a:srgbClr val="FF6600"/>
+                </a:solidFill>
+              </a:rPr>
+              <a:t> </a:t>
+            </a:r>
+            <a:r>
+              <a:rPr lang="en-US" i="1" dirty="0">
+                <a:solidFill>
+                  <a:srgbClr val="FF6600"/>
+                </a:solidFill>
+              </a:rPr>
+              <a:t>n</a:t>
+            </a:r>
+            <a:r>
+              <a:rPr lang="en-US" dirty="0">
+                <a:solidFill>
+                  <a:srgbClr val="FF6600"/>
+                </a:solidFill>
+              </a:rPr>
+              <a:t> </a:t>
+            </a:r>
+            <a:r>
+              <a:rPr lang="en-US" dirty="0"/>
+              <a:t>elements of an array:</a:t>
+            </a:r>
+          </a:p>
+          <a:p>
+            <a:pPr>
+              <a:buNone/>
+              <a:defRPr/>
+            </a:pPr>
+            <a:r>
+              <a:rPr lang="en-US" dirty="0">
+                <a:latin typeface="APL385 Unicode" panose="020B0709000202000203" pitchFamily="49" charset="0"/>
+              </a:rPr>
+              <a:t>     A ← </a:t>
+            </a:r>
+            <a:r>
+              <a:rPr lang="en-US" dirty="0">
+                <a:solidFill>
+                  <a:srgbClr val="FF6600"/>
+                </a:solidFill>
+                <a:latin typeface="APL385 Unicode" panose="020B0709000202000203" pitchFamily="49" charset="0"/>
+              </a:rPr>
+              <a:t>2 7 </a:t>
+            </a:r>
+            <a:r>
+              <a:rPr lang="en-US" dirty="0">
+                <a:latin typeface="APL385 Unicode" panose="020B0709000202000203" pitchFamily="49" charset="0"/>
+              </a:rPr>
+              <a:t>9 </a:t>
+            </a:r>
+            <a:r>
+              <a:rPr lang="en-US" dirty="0">
+                <a:solidFill>
+                  <a:srgbClr val="7030A0"/>
+                </a:solidFill>
+                <a:latin typeface="APL385 Unicode" panose="020B0709000202000203" pitchFamily="49" charset="0"/>
+              </a:rPr>
+              <a:t>¯2 12 ¯33</a:t>
+            </a:r>
+          </a:p>
+          <a:p>
+            <a:pPr>
+              <a:buNone/>
+              <a:defRPr/>
+            </a:pPr>
+            <a:r>
+              <a:rPr lang="en-US" dirty="0">
+                <a:latin typeface="APL385 Unicode" panose="020B0709000202000203" pitchFamily="49" charset="0"/>
+              </a:rPr>
+              <a:t>     </a:t>
+            </a:r>
+            <a:r>
+              <a:rPr lang="en-US" dirty="0">
+                <a:solidFill>
+                  <a:srgbClr val="FF6600"/>
+                </a:solidFill>
+                <a:latin typeface="APL385 Unicode" panose="020B0709000202000203" pitchFamily="49" charset="0"/>
+              </a:rPr>
+              <a:t>2</a:t>
+            </a:r>
+            <a:r>
+              <a:rPr lang="en-US" dirty="0">
+                <a:solidFill>
+                  <a:schemeClr val="tx1"/>
+                </a:solidFill>
+                <a:latin typeface="APL385 Unicode" panose="020B0709000202000203" pitchFamily="49" charset="0"/>
+              </a:rPr>
+              <a:t>↓A</a:t>
+            </a:r>
+          </a:p>
+          <a:p>
+            <a:pPr>
+              <a:buNone/>
+              <a:defRPr/>
+            </a:pPr>
+            <a:r>
+              <a:rPr lang="en-US" dirty="0">
+                <a:solidFill>
+                  <a:schemeClr val="tx1"/>
+                </a:solidFill>
+                <a:latin typeface="APL385 Unicode" panose="020B0709000202000203" pitchFamily="49" charset="0"/>
+              </a:rPr>
+              <a:t>9 ¯2 12 ¯33</a:t>
+            </a:r>
+          </a:p>
+          <a:p>
+            <a:pPr>
+              <a:buNone/>
+              <a:defRPr/>
+            </a:pPr>
+            <a:r>
+              <a:rPr lang="en-US" dirty="0"/>
+              <a:t>If </a:t>
+            </a:r>
+            <a:r>
+              <a:rPr lang="en-US" i="1" dirty="0">
+                <a:solidFill>
+                  <a:srgbClr val="FF6600"/>
+                </a:solidFill>
+              </a:rPr>
+              <a:t>n</a:t>
+            </a:r>
+            <a:r>
+              <a:rPr lang="en-US" dirty="0"/>
+              <a:t> is negative it drops from the </a:t>
+            </a:r>
+            <a:r>
+              <a:rPr lang="en-US" b="1" dirty="0"/>
+              <a:t>end</a:t>
+            </a:r>
+            <a:r>
+              <a:rPr lang="en-US" dirty="0"/>
+              <a:t>: </a:t>
+            </a:r>
+          </a:p>
+          <a:p>
+            <a:pPr>
+              <a:buNone/>
+              <a:defRPr/>
+            </a:pPr>
+            <a:r>
+              <a:rPr lang="en-US" dirty="0">
+                <a:latin typeface="APL385 Unicode" panose="020B0709000202000203" pitchFamily="49" charset="0"/>
+              </a:rPr>
+              <a:t>     </a:t>
+            </a:r>
+            <a:r>
+              <a:rPr lang="en-US" dirty="0">
+                <a:solidFill>
+                  <a:srgbClr val="7030A0"/>
+                </a:solidFill>
+                <a:latin typeface="APL385 Unicode" panose="020B0709000202000203" pitchFamily="49" charset="0"/>
+              </a:rPr>
+              <a:t>¯3</a:t>
+            </a:r>
+            <a:r>
+              <a:rPr lang="en-US" dirty="0">
+                <a:solidFill>
+                  <a:schemeClr val="tx1"/>
+                </a:solidFill>
+                <a:latin typeface="APL385 Unicode" panose="020B0709000202000203" pitchFamily="49" charset="0"/>
+              </a:rPr>
+              <a:t>↓</a:t>
+            </a:r>
+            <a:r>
+              <a:rPr lang="en-US" dirty="0">
+                <a:latin typeface="APL385 Unicode" panose="020B0709000202000203" pitchFamily="49" charset="0"/>
+              </a:rPr>
+              <a:t>A</a:t>
+            </a:r>
+          </a:p>
+          <a:p>
+            <a:pPr>
+              <a:buNone/>
+              <a:defRPr/>
+            </a:pPr>
+            <a:r>
+              <a:rPr lang="en-US" dirty="0">
+                <a:solidFill>
+                  <a:srgbClr val="7030A0"/>
+                </a:solidFill>
+                <a:latin typeface="APL385 Unicode" panose="020B0709000202000203" pitchFamily="49" charset="0"/>
+              </a:rPr>
+              <a:t>2 7 9</a:t>
+            </a:r>
+          </a:p>
+        </p:txBody>
+      </p:sp>
+      <p:sp>
+        <p:nvSpPr>
+          <p:cNvPr id="3" name="Title 2">
+            <a:extLst>
+              <a:ext uri="{FF2B5EF4-FFF2-40B4-BE49-F238E27FC236}">
+                <a16:creationId xmlns:a16="http://schemas.microsoft.com/office/drawing/2014/main" id="{6776F4F4-4FEC-8709-6BF0-E4CAF637A114}"/>
+              </a:ext>
+            </a:extLst>
+          </p:cNvPr>
+          <p:cNvSpPr>
+            <a:spLocks noGrp="1"/>
+          </p:cNvSpPr>
+          <p:nvPr>
+            <p:ph type="title"/>
+          </p:nvPr>
+        </p:nvSpPr>
+        <p:spPr/>
+        <p:txBody>
+          <a:bodyPr/>
+          <a:lstStyle/>
+          <a:p>
+            <a:r>
+              <a:rPr lang="en-GB" dirty="0"/>
+              <a:t>Structural Functions</a:t>
+            </a:r>
+          </a:p>
+        </p:txBody>
+      </p:sp>
+      <p:sp>
+        <p:nvSpPr>
+          <p:cNvPr id="4" name="Media Placeholder 3">
+            <a:extLst>
+              <a:ext uri="{FF2B5EF4-FFF2-40B4-BE49-F238E27FC236}">
+                <a16:creationId xmlns:a16="http://schemas.microsoft.com/office/drawing/2014/main" id="{FB10EFDA-26CC-640F-9776-F0BDAD82852F}"/>
+              </a:ext>
+            </a:extLst>
+          </p:cNvPr>
+          <p:cNvSpPr>
+            <a:spLocks noGrp="1"/>
+          </p:cNvSpPr>
+          <p:nvPr>
+            <p:ph type="media" sz="quarter" idx="11"/>
+          </p:nvPr>
+        </p:nvSpPr>
+        <p:spPr/>
+        <p:txBody>
+          <a:bodyPr/>
+          <a:lstStyle/>
+          <a:p>
+            <a:endParaRPr lang="en-GB"/>
+          </a:p>
+        </p:txBody>
+      </p:sp>
+    </p:spTree>
+    <p:extLst>
+      <p:ext uri="{BB962C8B-B14F-4D97-AF65-F5344CB8AC3E}">
+        <p14:creationId xmlns:p14="http://schemas.microsoft.com/office/powerpoint/2010/main" val="3513370303"/>
+      </p:ext>
+    </p:extLst>
+  </p:cSld>
+  <p:clrMapOvr>
+    <a:masterClrMapping/>
+  </p:clrMapOvr>
+</p:sld>
+</file>
+
+<file path=ppt/slides/slide63.xml><?xml version="1.0" encoding="utf-8"?>
+<p:sld xmlns:a="http://schemas.openxmlformats.org/drawingml/2006/main" xmlns:r="http://schemas.openxmlformats.org/officeDocument/2006/relationships" xmlns:p="http://schemas.openxmlformats.org/presentationml/2006/main">
+  <p:cSld>
+    <p:spTree>
+      <p:nvGrpSpPr>
+        <p:cNvPr id="1" name="">
+          <a:extLst>
+            <a:ext uri="{FF2B5EF4-FFF2-40B4-BE49-F238E27FC236}">
               <a16:creationId xmlns:a16="http://schemas.microsoft.com/office/drawing/2014/main" id="{3D5F20EB-A3F2-BD39-1EC6-083D9F9E6D5C}"/>
             </a:ext>
           </a:extLst>
@@ -17398,7 +17753,7 @@
 </p:sld>
 </file>
 
-<file path=ppt/slides/slide63.xml><?xml version="1.0" encoding="utf-8"?>
+<file path=ppt/slides/slide64.xml><?xml version="1.0" encoding="utf-8"?>
 <p:sld xmlns:a="http://schemas.openxmlformats.org/drawingml/2006/main" xmlns:r="http://schemas.openxmlformats.org/officeDocument/2006/relationships" xmlns:p="http://schemas.openxmlformats.org/presentationml/2006/main">
   <p:cSld>
     <p:spTree>
@@ -17727,7 +18082,7 @@
 </p:sld>
 </file>
 
-<file path=ppt/slides/slide64.xml><?xml version="1.0" encoding="utf-8"?>
+<file path=ppt/slides/slide65.xml><?xml version="1.0" encoding="utf-8"?>
 <p:sld xmlns:a="http://schemas.openxmlformats.org/drawingml/2006/main" xmlns:r="http://schemas.openxmlformats.org/officeDocument/2006/relationships" xmlns:p="http://schemas.openxmlformats.org/presentationml/2006/main">
   <p:cSld>
     <p:spTree>
@@ -17966,7 +18321,7 @@
 </p:sld>
 </file>
 
-<file path=ppt/slides/slide65.xml><?xml version="1.0" encoding="utf-8"?>
+<file path=ppt/slides/slide66.xml><?xml version="1.0" encoding="utf-8"?>
 <p:sld xmlns:a="http://schemas.openxmlformats.org/drawingml/2006/main" xmlns:r="http://schemas.openxmlformats.org/officeDocument/2006/relationships" xmlns:p="http://schemas.openxmlformats.org/presentationml/2006/main">
   <p:cSld>
     <p:spTree>
@@ -18279,7 +18634,7 @@
 </p:sld>
 </file>
 
-<file path=ppt/slides/slide66.xml><?xml version="1.0" encoding="utf-8"?>
+<file path=ppt/slides/slide67.xml><?xml version="1.0" encoding="utf-8"?>
 <p:sld xmlns:a="http://schemas.openxmlformats.org/drawingml/2006/main" xmlns:r="http://schemas.openxmlformats.org/officeDocument/2006/relationships" xmlns:p="http://schemas.openxmlformats.org/presentationml/2006/main">
   <p:cSld>
     <p:spTree>
@@ -18587,7 +18942,7 @@
 </p:sld>
 </file>
 
-<file path=ppt/slides/slide67.xml><?xml version="1.0" encoding="utf-8"?>
+<file path=ppt/slides/slide68.xml><?xml version="1.0" encoding="utf-8"?>
 <p:sld xmlns:a="http://schemas.openxmlformats.org/drawingml/2006/main" xmlns:r="http://schemas.openxmlformats.org/officeDocument/2006/relationships" xmlns:p="http://schemas.openxmlformats.org/presentationml/2006/main">
   <p:cSld>
     <p:spTree>
@@ -18966,7 +19321,7 @@
 </p:sld>
 </file>
 
-<file path=ppt/slides/slide68.xml><?xml version="1.0" encoding="utf-8"?>
+<file path=ppt/slides/slide69.xml><?xml version="1.0" encoding="utf-8"?>
 <p:sld xmlns:a="http://schemas.openxmlformats.org/drawingml/2006/main" xmlns:r="http://schemas.openxmlformats.org/officeDocument/2006/relationships" xmlns:p="http://schemas.openxmlformats.org/presentationml/2006/main">
   <p:cSld>
     <p:spTree>
@@ -19126,274 +19481,6 @@
     <p:extLst>
       <p:ext uri="{BB962C8B-B14F-4D97-AF65-F5344CB8AC3E}">
         <p14:creationId xmlns:p14="http://schemas.microsoft.com/office/powerpoint/2010/main" val="1479362047"/>
-      </p:ext>
-    </p:extLst>
-  </p:cSld>
-  <p:clrMapOvr>
-    <a:masterClrMapping/>
-  </p:clrMapOvr>
-</p:sld>
-</file>
-
-<file path=ppt/slides/slide69.xml><?xml version="1.0" encoding="utf-8"?>
-<p:sld xmlns:a="http://schemas.openxmlformats.org/drawingml/2006/main" xmlns:r="http://schemas.openxmlformats.org/officeDocument/2006/relationships" xmlns:p="http://schemas.openxmlformats.org/presentationml/2006/main">
-  <p:cSld>
-    <p:spTree>
-      <p:nvGrpSpPr>
-        <p:cNvPr id="1" name="">
-          <a:extLst>
-            <a:ext uri="{FF2B5EF4-FFF2-40B4-BE49-F238E27FC236}">
-              <a16:creationId xmlns:a16="http://schemas.microsoft.com/office/drawing/2014/main" id="{5F2D621D-9385-C4FA-F959-7F3FAE815395}"/>
-            </a:ext>
-          </a:extLst>
-        </p:cNvPr>
-        <p:cNvGrpSpPr/>
-        <p:nvPr/>
-      </p:nvGrpSpPr>
-      <p:grpSpPr>
-        <a:xfrm>
-          <a:off x="0" y="0"/>
-          <a:ext cx="0" cy="0"/>
-          <a:chOff x="0" y="0"/>
-          <a:chExt cx="0" cy="0"/>
-        </a:xfrm>
-      </p:grpSpPr>
-      <p:sp>
-        <p:nvSpPr>
-          <p:cNvPr id="2" name="Content Placeholder 1">
-            <a:extLst>
-              <a:ext uri="{FF2B5EF4-FFF2-40B4-BE49-F238E27FC236}">
-                <a16:creationId xmlns:a16="http://schemas.microsoft.com/office/drawing/2014/main" id="{103CB71C-0B90-719D-8638-24EB7CDBA5A8}"/>
-              </a:ext>
-            </a:extLst>
-          </p:cNvPr>
-          <p:cNvSpPr>
-            <a:spLocks noGrp="1"/>
-          </p:cNvSpPr>
-          <p:nvPr>
-            <p:ph idx="1"/>
-          </p:nvPr>
-        </p:nvSpPr>
-        <p:spPr/>
-        <p:txBody>
-          <a:bodyPr>
-            <a:normAutofit fontScale="92500" lnSpcReduction="20000"/>
-          </a:bodyPr>
-          <a:lstStyle/>
-          <a:p>
-            <a:pPr>
-              <a:buNone/>
-              <a:defRPr/>
-            </a:pPr>
-            <a:r>
-              <a:rPr lang="en-US" b="1" dirty="0"/>
-              <a:t>Compress</a:t>
-            </a:r>
-            <a:r>
-              <a:rPr lang="en-US" dirty="0"/>
-              <a:t> example: find the accounts with balances greater than $1,000</a:t>
-            </a:r>
-            <a:br>
-              <a:rPr lang="en-US" dirty="0"/>
-            </a:br>
-            <a:endParaRPr lang="en-US" dirty="0"/>
-          </a:p>
-          <a:p>
-            <a:pPr>
-              <a:buNone/>
-              <a:defRPr/>
-            </a:pPr>
-            <a:r>
-              <a:rPr lang="en-US" dirty="0">
-                <a:latin typeface="APL385 Unicode" panose="020B0709000202000203" pitchFamily="49" charset="0"/>
-              </a:rPr>
-              <a:t>    balance←100 </a:t>
-            </a:r>
-            <a:r>
-              <a:rPr lang="en-US" dirty="0">
-                <a:solidFill>
-                  <a:srgbClr val="FF6600"/>
-                </a:solidFill>
-                <a:latin typeface="APL385 Unicode" panose="020B0709000202000203" pitchFamily="49" charset="0"/>
-              </a:rPr>
-              <a:t>2000</a:t>
-            </a:r>
-            <a:r>
-              <a:rPr lang="en-US" dirty="0">
-                <a:latin typeface="APL385 Unicode" panose="020B0709000202000203" pitchFamily="49" charset="0"/>
-              </a:rPr>
-              <a:t> 500 </a:t>
-            </a:r>
-            <a:r>
-              <a:rPr lang="en-US" dirty="0">
-                <a:solidFill>
-                  <a:srgbClr val="FF6600"/>
-                </a:solidFill>
-                <a:latin typeface="APL385 Unicode" panose="020B0709000202000203" pitchFamily="49" charset="0"/>
-              </a:rPr>
-              <a:t>5000</a:t>
-            </a:r>
-          </a:p>
-          <a:p>
-            <a:pPr>
-              <a:buNone/>
-              <a:defRPr/>
-            </a:pPr>
-            <a:r>
-              <a:rPr lang="en-US" dirty="0">
-                <a:latin typeface="APL385 Unicode" panose="020B0709000202000203" pitchFamily="49" charset="0"/>
-              </a:rPr>
-              <a:t>    account←123 </a:t>
-            </a:r>
-            <a:r>
-              <a:rPr lang="en-US" dirty="0">
-                <a:solidFill>
-                  <a:srgbClr val="FF6600"/>
-                </a:solidFill>
-                <a:latin typeface="APL385 Unicode" panose="020B0709000202000203" pitchFamily="49" charset="0"/>
-              </a:rPr>
-              <a:t>4321</a:t>
-            </a:r>
-            <a:r>
-              <a:rPr lang="en-US" dirty="0">
-                <a:latin typeface="APL385 Unicode" panose="020B0709000202000203" pitchFamily="49" charset="0"/>
-              </a:rPr>
-              <a:t> 2345 </a:t>
-            </a:r>
-            <a:r>
-              <a:rPr lang="en-US" dirty="0">
-                <a:solidFill>
-                  <a:srgbClr val="FF6600"/>
-                </a:solidFill>
-                <a:latin typeface="APL385 Unicode" panose="020B0709000202000203" pitchFamily="49" charset="0"/>
-              </a:rPr>
-              <a:t>666</a:t>
-            </a:r>
-          </a:p>
-          <a:p>
-            <a:pPr>
-              <a:buNone/>
-              <a:defRPr/>
-            </a:pPr>
-            <a:r>
-              <a:rPr lang="en-US" dirty="0">
-                <a:solidFill>
-                  <a:srgbClr val="00B050"/>
-                </a:solidFill>
-                <a:latin typeface="APL385 Unicode" panose="020B0709000202000203" pitchFamily="49" charset="0"/>
-              </a:rPr>
-              <a:t>    </a:t>
-            </a:r>
-            <a:r>
-              <a:rPr lang="en-US" dirty="0" err="1">
-                <a:solidFill>
-                  <a:srgbClr val="00B050"/>
-                </a:solidFill>
-                <a:latin typeface="APL385 Unicode" panose="020B0709000202000203" pitchFamily="49" charset="0"/>
-              </a:rPr>
-              <a:t>s←balance</a:t>
-            </a:r>
-            <a:r>
-              <a:rPr lang="en-US" dirty="0">
-                <a:solidFill>
-                  <a:srgbClr val="00B050"/>
-                </a:solidFill>
-                <a:latin typeface="APL385 Unicode" panose="020B0709000202000203" pitchFamily="49" charset="0"/>
-              </a:rPr>
-              <a:t> &gt; 1000</a:t>
-            </a:r>
-          </a:p>
-          <a:p>
-            <a:pPr>
-              <a:buNone/>
-              <a:defRPr/>
-            </a:pPr>
-            <a:r>
-              <a:rPr lang="en-US" dirty="0">
-                <a:solidFill>
-                  <a:srgbClr val="00B050"/>
-                </a:solidFill>
-                <a:latin typeface="APL385 Unicode" panose="020B0709000202000203" pitchFamily="49" charset="0"/>
-              </a:rPr>
-              <a:t>    s / account</a:t>
-            </a:r>
-          </a:p>
-          <a:p>
-            <a:pPr>
-              <a:buNone/>
-              <a:defRPr/>
-            </a:pPr>
-            <a:r>
-              <a:rPr lang="en-US" dirty="0">
-                <a:solidFill>
-                  <a:schemeClr val="accent3">
-                    <a:lumMod val="50000"/>
-                  </a:schemeClr>
-                </a:solidFill>
-                <a:latin typeface="APL385 Unicode" panose="020B0709000202000203" pitchFamily="49" charset="0"/>
-              </a:rPr>
-              <a:t>4321 666</a:t>
-            </a:r>
-          </a:p>
-        </p:txBody>
-      </p:sp>
-      <p:sp>
-        <p:nvSpPr>
-          <p:cNvPr id="3" name="Title 2">
-            <a:extLst>
-              <a:ext uri="{FF2B5EF4-FFF2-40B4-BE49-F238E27FC236}">
-                <a16:creationId xmlns:a16="http://schemas.microsoft.com/office/drawing/2014/main" id="{661D2EC1-75A9-4790-8B5C-1C9B3ADB63F5}"/>
-              </a:ext>
-            </a:extLst>
-          </p:cNvPr>
-          <p:cNvSpPr>
-            <a:spLocks noGrp="1"/>
-          </p:cNvSpPr>
-          <p:nvPr>
-            <p:ph type="title"/>
-          </p:nvPr>
-        </p:nvSpPr>
-        <p:spPr/>
-        <p:txBody>
-          <a:bodyPr/>
-          <a:lstStyle/>
-          <a:p>
-            <a:r>
-              <a:rPr lang="en-GB" dirty="0"/>
-              <a:t>Structural Functions</a:t>
-            </a:r>
-          </a:p>
-        </p:txBody>
-      </p:sp>
-      <p:sp>
-        <p:nvSpPr>
-          <p:cNvPr id="4" name="Media Placeholder 3">
-            <a:extLst>
-              <a:ext uri="{FF2B5EF4-FFF2-40B4-BE49-F238E27FC236}">
-                <a16:creationId xmlns:a16="http://schemas.microsoft.com/office/drawing/2014/main" id="{D4A9E395-F9BE-4A3D-1A91-D70C2F42E88A}"/>
-              </a:ext>
-            </a:extLst>
-          </p:cNvPr>
-          <p:cNvSpPr>
-            <a:spLocks noGrp="1"/>
-          </p:cNvSpPr>
-          <p:nvPr>
-            <p:ph type="media" sz="quarter" idx="11"/>
-          </p:nvPr>
-        </p:nvSpPr>
-        <p:spPr/>
-        <p:txBody>
-          <a:bodyPr/>
-          <a:lstStyle/>
-          <a:p>
-            <a:endParaRPr lang="en-GB"/>
-          </a:p>
-        </p:txBody>
-      </p:sp>
-    </p:spTree>
-    <p:extLst>
-      <p:ext uri="{BB962C8B-B14F-4D97-AF65-F5344CB8AC3E}">
-        <p14:creationId xmlns:p14="http://schemas.microsoft.com/office/powerpoint/2010/main" val="699073559"/>
       </p:ext>
     </p:extLst>
   </p:cSld>
@@ -19618,6 +19705,274 @@
         <p:cNvPr id="1" name="">
           <a:extLst>
             <a:ext uri="{FF2B5EF4-FFF2-40B4-BE49-F238E27FC236}">
+              <a16:creationId xmlns:a16="http://schemas.microsoft.com/office/drawing/2014/main" id="{5F2D621D-9385-C4FA-F959-7F3FAE815395}"/>
+            </a:ext>
+          </a:extLst>
+        </p:cNvPr>
+        <p:cNvGrpSpPr/>
+        <p:nvPr/>
+      </p:nvGrpSpPr>
+      <p:grpSpPr>
+        <a:xfrm>
+          <a:off x="0" y="0"/>
+          <a:ext cx="0" cy="0"/>
+          <a:chOff x="0" y="0"/>
+          <a:chExt cx="0" cy="0"/>
+        </a:xfrm>
+      </p:grpSpPr>
+      <p:sp>
+        <p:nvSpPr>
+          <p:cNvPr id="2" name="Content Placeholder 1">
+            <a:extLst>
+              <a:ext uri="{FF2B5EF4-FFF2-40B4-BE49-F238E27FC236}">
+                <a16:creationId xmlns:a16="http://schemas.microsoft.com/office/drawing/2014/main" id="{103CB71C-0B90-719D-8638-24EB7CDBA5A8}"/>
+              </a:ext>
+            </a:extLst>
+          </p:cNvPr>
+          <p:cNvSpPr>
+            <a:spLocks noGrp="1"/>
+          </p:cNvSpPr>
+          <p:nvPr>
+            <p:ph idx="1"/>
+          </p:nvPr>
+        </p:nvSpPr>
+        <p:spPr/>
+        <p:txBody>
+          <a:bodyPr>
+            <a:normAutofit fontScale="92500" lnSpcReduction="20000"/>
+          </a:bodyPr>
+          <a:lstStyle/>
+          <a:p>
+            <a:pPr>
+              <a:buNone/>
+              <a:defRPr/>
+            </a:pPr>
+            <a:r>
+              <a:rPr lang="en-US" b="1" dirty="0"/>
+              <a:t>Compress</a:t>
+            </a:r>
+            <a:r>
+              <a:rPr lang="en-US" dirty="0"/>
+              <a:t> example: find the accounts with balances greater than $1,000</a:t>
+            </a:r>
+            <a:br>
+              <a:rPr lang="en-US" dirty="0"/>
+            </a:br>
+            <a:endParaRPr lang="en-US" dirty="0"/>
+          </a:p>
+          <a:p>
+            <a:pPr>
+              <a:buNone/>
+              <a:defRPr/>
+            </a:pPr>
+            <a:r>
+              <a:rPr lang="en-US" dirty="0">
+                <a:latin typeface="APL385 Unicode" panose="020B0709000202000203" pitchFamily="49" charset="0"/>
+              </a:rPr>
+              <a:t>    balance←100 </a:t>
+            </a:r>
+            <a:r>
+              <a:rPr lang="en-US" dirty="0">
+                <a:solidFill>
+                  <a:srgbClr val="FF6600"/>
+                </a:solidFill>
+                <a:latin typeface="APL385 Unicode" panose="020B0709000202000203" pitchFamily="49" charset="0"/>
+              </a:rPr>
+              <a:t>2000</a:t>
+            </a:r>
+            <a:r>
+              <a:rPr lang="en-US" dirty="0">
+                <a:latin typeface="APL385 Unicode" panose="020B0709000202000203" pitchFamily="49" charset="0"/>
+              </a:rPr>
+              <a:t> 500 </a:t>
+            </a:r>
+            <a:r>
+              <a:rPr lang="en-US" dirty="0">
+                <a:solidFill>
+                  <a:srgbClr val="FF6600"/>
+                </a:solidFill>
+                <a:latin typeface="APL385 Unicode" panose="020B0709000202000203" pitchFamily="49" charset="0"/>
+              </a:rPr>
+              <a:t>5000</a:t>
+            </a:r>
+          </a:p>
+          <a:p>
+            <a:pPr>
+              <a:buNone/>
+              <a:defRPr/>
+            </a:pPr>
+            <a:r>
+              <a:rPr lang="en-US" dirty="0">
+                <a:latin typeface="APL385 Unicode" panose="020B0709000202000203" pitchFamily="49" charset="0"/>
+              </a:rPr>
+              <a:t>    account←123 </a:t>
+            </a:r>
+            <a:r>
+              <a:rPr lang="en-US" dirty="0">
+                <a:solidFill>
+                  <a:srgbClr val="FF6600"/>
+                </a:solidFill>
+                <a:latin typeface="APL385 Unicode" panose="020B0709000202000203" pitchFamily="49" charset="0"/>
+              </a:rPr>
+              <a:t>4321</a:t>
+            </a:r>
+            <a:r>
+              <a:rPr lang="en-US" dirty="0">
+                <a:latin typeface="APL385 Unicode" panose="020B0709000202000203" pitchFamily="49" charset="0"/>
+              </a:rPr>
+              <a:t> 2345 </a:t>
+            </a:r>
+            <a:r>
+              <a:rPr lang="en-US" dirty="0">
+                <a:solidFill>
+                  <a:srgbClr val="FF6600"/>
+                </a:solidFill>
+                <a:latin typeface="APL385 Unicode" panose="020B0709000202000203" pitchFamily="49" charset="0"/>
+              </a:rPr>
+              <a:t>666</a:t>
+            </a:r>
+          </a:p>
+          <a:p>
+            <a:pPr>
+              <a:buNone/>
+              <a:defRPr/>
+            </a:pPr>
+            <a:r>
+              <a:rPr lang="en-US" dirty="0">
+                <a:solidFill>
+                  <a:srgbClr val="00B050"/>
+                </a:solidFill>
+                <a:latin typeface="APL385 Unicode" panose="020B0709000202000203" pitchFamily="49" charset="0"/>
+              </a:rPr>
+              <a:t>    </a:t>
+            </a:r>
+            <a:r>
+              <a:rPr lang="en-US" dirty="0" err="1">
+                <a:solidFill>
+                  <a:srgbClr val="00B050"/>
+                </a:solidFill>
+                <a:latin typeface="APL385 Unicode" panose="020B0709000202000203" pitchFamily="49" charset="0"/>
+              </a:rPr>
+              <a:t>s←balance</a:t>
+            </a:r>
+            <a:r>
+              <a:rPr lang="en-US" dirty="0">
+                <a:solidFill>
+                  <a:srgbClr val="00B050"/>
+                </a:solidFill>
+                <a:latin typeface="APL385 Unicode" panose="020B0709000202000203" pitchFamily="49" charset="0"/>
+              </a:rPr>
+              <a:t> &gt; 1000</a:t>
+            </a:r>
+          </a:p>
+          <a:p>
+            <a:pPr>
+              <a:buNone/>
+              <a:defRPr/>
+            </a:pPr>
+            <a:r>
+              <a:rPr lang="en-US" dirty="0">
+                <a:solidFill>
+                  <a:srgbClr val="00B050"/>
+                </a:solidFill>
+                <a:latin typeface="APL385 Unicode" panose="020B0709000202000203" pitchFamily="49" charset="0"/>
+              </a:rPr>
+              <a:t>    s / account</a:t>
+            </a:r>
+          </a:p>
+          <a:p>
+            <a:pPr>
+              <a:buNone/>
+              <a:defRPr/>
+            </a:pPr>
+            <a:r>
+              <a:rPr lang="en-US" dirty="0">
+                <a:solidFill>
+                  <a:schemeClr val="accent3">
+                    <a:lumMod val="50000"/>
+                  </a:schemeClr>
+                </a:solidFill>
+                <a:latin typeface="APL385 Unicode" panose="020B0709000202000203" pitchFamily="49" charset="0"/>
+              </a:rPr>
+              <a:t>4321 666</a:t>
+            </a:r>
+          </a:p>
+        </p:txBody>
+      </p:sp>
+      <p:sp>
+        <p:nvSpPr>
+          <p:cNvPr id="3" name="Title 2">
+            <a:extLst>
+              <a:ext uri="{FF2B5EF4-FFF2-40B4-BE49-F238E27FC236}">
+                <a16:creationId xmlns:a16="http://schemas.microsoft.com/office/drawing/2014/main" id="{661D2EC1-75A9-4790-8B5C-1C9B3ADB63F5}"/>
+              </a:ext>
+            </a:extLst>
+          </p:cNvPr>
+          <p:cNvSpPr>
+            <a:spLocks noGrp="1"/>
+          </p:cNvSpPr>
+          <p:nvPr>
+            <p:ph type="title"/>
+          </p:nvPr>
+        </p:nvSpPr>
+        <p:spPr/>
+        <p:txBody>
+          <a:bodyPr/>
+          <a:lstStyle/>
+          <a:p>
+            <a:r>
+              <a:rPr lang="en-GB" dirty="0"/>
+              <a:t>Structural Functions</a:t>
+            </a:r>
+          </a:p>
+        </p:txBody>
+      </p:sp>
+      <p:sp>
+        <p:nvSpPr>
+          <p:cNvPr id="4" name="Media Placeholder 3">
+            <a:extLst>
+              <a:ext uri="{FF2B5EF4-FFF2-40B4-BE49-F238E27FC236}">
+                <a16:creationId xmlns:a16="http://schemas.microsoft.com/office/drawing/2014/main" id="{D4A9E395-F9BE-4A3D-1A91-D70C2F42E88A}"/>
+              </a:ext>
+            </a:extLst>
+          </p:cNvPr>
+          <p:cNvSpPr>
+            <a:spLocks noGrp="1"/>
+          </p:cNvSpPr>
+          <p:nvPr>
+            <p:ph type="media" sz="quarter" idx="11"/>
+          </p:nvPr>
+        </p:nvSpPr>
+        <p:spPr/>
+        <p:txBody>
+          <a:bodyPr/>
+          <a:lstStyle/>
+          <a:p>
+            <a:endParaRPr lang="en-GB"/>
+          </a:p>
+        </p:txBody>
+      </p:sp>
+    </p:spTree>
+    <p:extLst>
+      <p:ext uri="{BB962C8B-B14F-4D97-AF65-F5344CB8AC3E}">
+        <p14:creationId xmlns:p14="http://schemas.microsoft.com/office/powerpoint/2010/main" val="699073559"/>
+      </p:ext>
+    </p:extLst>
+  </p:cSld>
+  <p:clrMapOvr>
+    <a:masterClrMapping/>
+  </p:clrMapOvr>
+</p:sld>
+</file>
+
+<file path=ppt/slides/slide71.xml><?xml version="1.0" encoding="utf-8"?>
+<p:sld xmlns:a="http://schemas.openxmlformats.org/drawingml/2006/main" xmlns:r="http://schemas.openxmlformats.org/officeDocument/2006/relationships" xmlns:p="http://schemas.openxmlformats.org/presentationml/2006/main">
+  <p:cSld>
+    <p:spTree>
+      <p:nvGrpSpPr>
+        <p:cNvPr id="1" name="">
+          <a:extLst>
+            <a:ext uri="{FF2B5EF4-FFF2-40B4-BE49-F238E27FC236}">
               <a16:creationId xmlns:a16="http://schemas.microsoft.com/office/drawing/2014/main" id="{DD5B4769-5AC7-A071-8605-48E658AC1DDA}"/>
             </a:ext>
           </a:extLst>
@@ -19908,7 +20263,7 @@
 </p:sld>
 </file>
 
-<file path=ppt/slides/slide71.xml><?xml version="1.0" encoding="utf-8"?>
+<file path=ppt/slides/slide72.xml><?xml version="1.0" encoding="utf-8"?>
 <p:sld xmlns:a="http://schemas.openxmlformats.org/drawingml/2006/main" xmlns:r="http://schemas.openxmlformats.org/officeDocument/2006/relationships" xmlns:p="http://schemas.openxmlformats.org/presentationml/2006/main">
   <p:cSld>
     <p:spTree>
@@ -20111,7 +20466,7 @@
 </p:sld>
 </file>
 
-<file path=ppt/slides/slide72.xml><?xml version="1.0" encoding="utf-8"?>
+<file path=ppt/slides/slide73.xml><?xml version="1.0" encoding="utf-8"?>
 <p:sld xmlns:a="http://schemas.openxmlformats.org/drawingml/2006/main" xmlns:r="http://schemas.openxmlformats.org/officeDocument/2006/relationships" xmlns:p="http://schemas.openxmlformats.org/presentationml/2006/main">
   <p:cSld>
     <p:spTree>
@@ -20928,7 +21283,7 @@
 </p:sld>
 </file>
 
-<file path=ppt/slides/slide73.xml><?xml version="1.0" encoding="utf-8"?>
+<file path=ppt/slides/slide74.xml><?xml version="1.0" encoding="utf-8"?>
 <p:sld xmlns:a="http://schemas.openxmlformats.org/drawingml/2006/main" xmlns:r="http://schemas.openxmlformats.org/officeDocument/2006/relationships" xmlns:p="http://schemas.openxmlformats.org/presentationml/2006/main">
   <p:cSld>
     <p:spTree>
@@ -21596,7 +21951,7 @@
 </p:sld>
 </file>
 
-<file path=ppt/slides/slide74.xml><?xml version="1.0" encoding="utf-8"?>
+<file path=ppt/slides/slide75.xml><?xml version="1.0" encoding="utf-8"?>
 <p:sld xmlns:a="http://schemas.openxmlformats.org/drawingml/2006/main" xmlns:r="http://schemas.openxmlformats.org/officeDocument/2006/relationships" xmlns:p="http://schemas.openxmlformats.org/presentationml/2006/main">
   <p:cSld>
     <p:spTree>
@@ -21904,7 +22259,7 @@
 </p:sld>
 </file>
 
-<file path=ppt/slides/slide75.xml><?xml version="1.0" encoding="utf-8"?>
+<file path=ppt/slides/slide76.xml><?xml version="1.0" encoding="utf-8"?>
 <p:sld xmlns:a="http://schemas.openxmlformats.org/drawingml/2006/main" xmlns:r="http://schemas.openxmlformats.org/officeDocument/2006/relationships" xmlns:p="http://schemas.openxmlformats.org/presentationml/2006/main">
   <p:cSld>
     <p:spTree>
@@ -22200,7 +22555,7 @@
 </p:sld>
 </file>
 
-<file path=ppt/slides/slide76.xml><?xml version="1.0" encoding="utf-8"?>
+<file path=ppt/slides/slide77.xml><?xml version="1.0" encoding="utf-8"?>
 <p:sld xmlns:a="http://schemas.openxmlformats.org/drawingml/2006/main" xmlns:r="http://schemas.openxmlformats.org/officeDocument/2006/relationships" xmlns:p="http://schemas.openxmlformats.org/presentationml/2006/main">
   <p:cSld>
     <p:spTree>
@@ -23825,7 +24180,7 @@
 </p:sld>
 </file>
 
-<file path=ppt/slides/slide77.xml><?xml version="1.0" encoding="utf-8"?>
+<file path=ppt/slides/slide78.xml><?xml version="1.0" encoding="utf-8"?>
 <p:sld xmlns:a="http://schemas.openxmlformats.org/drawingml/2006/main" xmlns:r="http://schemas.openxmlformats.org/officeDocument/2006/relationships" xmlns:p="http://schemas.openxmlformats.org/presentationml/2006/main">
   <p:cSld>
     <p:spTree>
@@ -24188,7 +24543,7 @@
 </p:sld>
 </file>
 
-<file path=ppt/slides/slide78.xml><?xml version="1.0" encoding="utf-8"?>
+<file path=ppt/slides/slide79.xml><?xml version="1.0" encoding="utf-8"?>
 <p:sld xmlns:a="http://schemas.openxmlformats.org/drawingml/2006/main" xmlns:r="http://schemas.openxmlformats.org/officeDocument/2006/relationships" xmlns:p="http://schemas.openxmlformats.org/presentationml/2006/main">
   <p:cSld>
     <p:spTree>
@@ -24393,133 +24748,6 @@
     <p:extLst>
       <p:ext uri="{BB962C8B-B14F-4D97-AF65-F5344CB8AC3E}">
         <p14:creationId xmlns:p14="http://schemas.microsoft.com/office/powerpoint/2010/main" val="3264011610"/>
-      </p:ext>
-    </p:extLst>
-  </p:cSld>
-  <p:clrMapOvr>
-    <a:masterClrMapping/>
-  </p:clrMapOvr>
-</p:sld>
-</file>
-
-<file path=ppt/slides/slide79.xml><?xml version="1.0" encoding="utf-8"?>
-<p:sld xmlns:a="http://schemas.openxmlformats.org/drawingml/2006/main" xmlns:r="http://schemas.openxmlformats.org/officeDocument/2006/relationships" xmlns:p="http://schemas.openxmlformats.org/presentationml/2006/main">
-  <p:cSld>
-    <p:spTree>
-      <p:nvGrpSpPr>
-        <p:cNvPr id="1" name="">
-          <a:extLst>
-            <a:ext uri="{FF2B5EF4-FFF2-40B4-BE49-F238E27FC236}">
-              <a16:creationId xmlns:a16="http://schemas.microsoft.com/office/drawing/2014/main" id="{D6027280-ECE8-B8FB-C4BC-810EE2F8F2BC}"/>
-            </a:ext>
-          </a:extLst>
-        </p:cNvPr>
-        <p:cNvGrpSpPr/>
-        <p:nvPr/>
-      </p:nvGrpSpPr>
-      <p:grpSpPr>
-        <a:xfrm>
-          <a:off x="0" y="0"/>
-          <a:ext cx="0" cy="0"/>
-          <a:chOff x="0" y="0"/>
-          <a:chExt cx="0" cy="0"/>
-        </a:xfrm>
-      </p:grpSpPr>
-      <p:sp>
-        <p:nvSpPr>
-          <p:cNvPr id="2" name="Content Placeholder 1">
-            <a:extLst>
-              <a:ext uri="{FF2B5EF4-FFF2-40B4-BE49-F238E27FC236}">
-                <a16:creationId xmlns:a16="http://schemas.microsoft.com/office/drawing/2014/main" id="{52F782DF-607F-2CCA-F9ED-DF677426D47F}"/>
-              </a:ext>
-            </a:extLst>
-          </p:cNvPr>
-          <p:cNvSpPr>
-            <a:spLocks noGrp="1"/>
-          </p:cNvSpPr>
-          <p:nvPr>
-            <p:ph idx="1"/>
-          </p:nvPr>
-        </p:nvSpPr>
-        <p:spPr>
-          <a:xfrm rot="18962600">
-            <a:off x="323527" y="1365421"/>
-            <a:ext cx="8443592" cy="3141543"/>
-          </a:xfrm>
-        </p:spPr>
-        <p:txBody>
-          <a:bodyPr>
-            <a:normAutofit/>
-          </a:bodyPr>
-          <a:lstStyle/>
-          <a:p>
-            <a:pPr marL="0" indent="0" algn="ctr">
-              <a:buNone/>
-            </a:pPr>
-            <a:r>
-              <a:rPr lang="en-GB" sz="15000" dirty="0"/>
-              <a:t>🤔</a:t>
-            </a:r>
-          </a:p>
-        </p:txBody>
-      </p:sp>
-      <p:sp>
-        <p:nvSpPr>
-          <p:cNvPr id="3" name="Title 2">
-            <a:extLst>
-              <a:ext uri="{FF2B5EF4-FFF2-40B4-BE49-F238E27FC236}">
-                <a16:creationId xmlns:a16="http://schemas.microsoft.com/office/drawing/2014/main" id="{473C7017-B48B-8905-AD69-2612689F61CE}"/>
-              </a:ext>
-            </a:extLst>
-          </p:cNvPr>
-          <p:cNvSpPr>
-            <a:spLocks noGrp="1"/>
-          </p:cNvSpPr>
-          <p:nvPr>
-            <p:ph type="title"/>
-          </p:nvPr>
-        </p:nvSpPr>
-        <p:spPr/>
-        <p:txBody>
-          <a:bodyPr/>
-          <a:lstStyle/>
-          <a:p>
-            <a:r>
-              <a:rPr lang="en-GB" dirty="0"/>
-              <a:t>Questions?</a:t>
-            </a:r>
-          </a:p>
-        </p:txBody>
-      </p:sp>
-      <p:sp>
-        <p:nvSpPr>
-          <p:cNvPr id="4" name="Media Placeholder 3">
-            <a:extLst>
-              <a:ext uri="{FF2B5EF4-FFF2-40B4-BE49-F238E27FC236}">
-                <a16:creationId xmlns:a16="http://schemas.microsoft.com/office/drawing/2014/main" id="{B1FD21AF-1211-EB93-7D9C-5F213F36221A}"/>
-              </a:ext>
-            </a:extLst>
-          </p:cNvPr>
-          <p:cNvSpPr>
-            <a:spLocks noGrp="1"/>
-          </p:cNvSpPr>
-          <p:nvPr>
-            <p:ph type="media" sz="quarter" idx="11"/>
-          </p:nvPr>
-        </p:nvSpPr>
-        <p:spPr/>
-        <p:txBody>
-          <a:bodyPr/>
-          <a:lstStyle/>
-          <a:p>
-            <a:endParaRPr lang="en-GB"/>
-          </a:p>
-        </p:txBody>
-      </p:sp>
-    </p:spTree>
-    <p:extLst>
-      <p:ext uri="{BB962C8B-B14F-4D97-AF65-F5344CB8AC3E}">
-        <p14:creationId xmlns:p14="http://schemas.microsoft.com/office/powerpoint/2010/main" val="3921189455"/>
       </p:ext>
     </p:extLst>
   </p:cSld>
@@ -24771,6 +24999,133 @@
 </file>
 
 <file path=ppt/slides/slide80.xml><?xml version="1.0" encoding="utf-8"?>
+<p:sld xmlns:a="http://schemas.openxmlformats.org/drawingml/2006/main" xmlns:r="http://schemas.openxmlformats.org/officeDocument/2006/relationships" xmlns:p="http://schemas.openxmlformats.org/presentationml/2006/main">
+  <p:cSld>
+    <p:spTree>
+      <p:nvGrpSpPr>
+        <p:cNvPr id="1" name="">
+          <a:extLst>
+            <a:ext uri="{FF2B5EF4-FFF2-40B4-BE49-F238E27FC236}">
+              <a16:creationId xmlns:a16="http://schemas.microsoft.com/office/drawing/2014/main" id="{D6027280-ECE8-B8FB-C4BC-810EE2F8F2BC}"/>
+            </a:ext>
+          </a:extLst>
+        </p:cNvPr>
+        <p:cNvGrpSpPr/>
+        <p:nvPr/>
+      </p:nvGrpSpPr>
+      <p:grpSpPr>
+        <a:xfrm>
+          <a:off x="0" y="0"/>
+          <a:ext cx="0" cy="0"/>
+          <a:chOff x="0" y="0"/>
+          <a:chExt cx="0" cy="0"/>
+        </a:xfrm>
+      </p:grpSpPr>
+      <p:sp>
+        <p:nvSpPr>
+          <p:cNvPr id="2" name="Content Placeholder 1">
+            <a:extLst>
+              <a:ext uri="{FF2B5EF4-FFF2-40B4-BE49-F238E27FC236}">
+                <a16:creationId xmlns:a16="http://schemas.microsoft.com/office/drawing/2014/main" id="{52F782DF-607F-2CCA-F9ED-DF677426D47F}"/>
+              </a:ext>
+            </a:extLst>
+          </p:cNvPr>
+          <p:cNvSpPr>
+            <a:spLocks noGrp="1"/>
+          </p:cNvSpPr>
+          <p:nvPr>
+            <p:ph idx="1"/>
+          </p:nvPr>
+        </p:nvSpPr>
+        <p:spPr>
+          <a:xfrm rot="18962600">
+            <a:off x="323527" y="1365421"/>
+            <a:ext cx="8443592" cy="3141543"/>
+          </a:xfrm>
+        </p:spPr>
+        <p:txBody>
+          <a:bodyPr>
+            <a:normAutofit/>
+          </a:bodyPr>
+          <a:lstStyle/>
+          <a:p>
+            <a:pPr marL="0" indent="0" algn="ctr">
+              <a:buNone/>
+            </a:pPr>
+            <a:r>
+              <a:rPr lang="en-GB" sz="15000" dirty="0"/>
+              <a:t>🤔</a:t>
+            </a:r>
+          </a:p>
+        </p:txBody>
+      </p:sp>
+      <p:sp>
+        <p:nvSpPr>
+          <p:cNvPr id="3" name="Title 2">
+            <a:extLst>
+              <a:ext uri="{FF2B5EF4-FFF2-40B4-BE49-F238E27FC236}">
+                <a16:creationId xmlns:a16="http://schemas.microsoft.com/office/drawing/2014/main" id="{473C7017-B48B-8905-AD69-2612689F61CE}"/>
+              </a:ext>
+            </a:extLst>
+          </p:cNvPr>
+          <p:cNvSpPr>
+            <a:spLocks noGrp="1"/>
+          </p:cNvSpPr>
+          <p:nvPr>
+            <p:ph type="title"/>
+          </p:nvPr>
+        </p:nvSpPr>
+        <p:spPr/>
+        <p:txBody>
+          <a:bodyPr/>
+          <a:lstStyle/>
+          <a:p>
+            <a:r>
+              <a:rPr lang="en-GB" dirty="0"/>
+              <a:t>Questions?</a:t>
+            </a:r>
+          </a:p>
+        </p:txBody>
+      </p:sp>
+      <p:sp>
+        <p:nvSpPr>
+          <p:cNvPr id="4" name="Media Placeholder 3">
+            <a:extLst>
+              <a:ext uri="{FF2B5EF4-FFF2-40B4-BE49-F238E27FC236}">
+                <a16:creationId xmlns:a16="http://schemas.microsoft.com/office/drawing/2014/main" id="{B1FD21AF-1211-EB93-7D9C-5F213F36221A}"/>
+              </a:ext>
+            </a:extLst>
+          </p:cNvPr>
+          <p:cNvSpPr>
+            <a:spLocks noGrp="1"/>
+          </p:cNvSpPr>
+          <p:nvPr>
+            <p:ph type="media" sz="quarter" idx="11"/>
+          </p:nvPr>
+        </p:nvSpPr>
+        <p:spPr/>
+        <p:txBody>
+          <a:bodyPr/>
+          <a:lstStyle/>
+          <a:p>
+            <a:endParaRPr lang="en-GB"/>
+          </a:p>
+        </p:txBody>
+      </p:sp>
+    </p:spTree>
+    <p:extLst>
+      <p:ext uri="{BB962C8B-B14F-4D97-AF65-F5344CB8AC3E}">
+        <p14:creationId xmlns:p14="http://schemas.microsoft.com/office/powerpoint/2010/main" val="3921189455"/>
+      </p:ext>
+    </p:extLst>
+  </p:cSld>
+  <p:clrMapOvr>
+    <a:masterClrMapping/>
+  </p:clrMapOvr>
+</p:sld>
+</file>
+
+<file path=ppt/slides/slide81.xml><?xml version="1.0" encoding="utf-8"?>
 <p:sld xmlns:a="http://schemas.openxmlformats.org/drawingml/2006/main" xmlns:r="http://schemas.openxmlformats.org/officeDocument/2006/relationships" xmlns:p="http://schemas.openxmlformats.org/presentationml/2006/main">
   <p:cSld>
     <p:spTree>

--- a/slides/APL_Bootcamp-part-4.pptx
+++ b/slides/APL_Bootcamp-part-4.pptx
@@ -333,7 +333,7 @@
               <a:rPr lang="en-GB" smtClean="0">
                 <a:latin typeface="Sarabun" panose="00000500000000000000" pitchFamily="2" charset="-34"/>
               </a:rPr>
-              <a:t>20/08/2025</a:t>
+              <a:t>28/08/2025</a:t>
             </a:fld>
             <a:endParaRPr lang="en-GB" dirty="0">
               <a:latin typeface="Sarabun" panose="00000500000000000000" pitchFamily="2" charset="-34"/>
@@ -511,7 +511,7 @@
             <a:fld id="{CDEAEF8A-5BB8-41C8-B8C2-160617C17EF4}" type="datetimeFigureOut">
               <a:rPr lang="en-GB" smtClean="0"/>
               <a:pPr/>
-              <a:t>20/08/2025</a:t>
+              <a:t>28/08/2025</a:t>
             </a:fld>
             <a:endParaRPr lang="en-GB" dirty="0"/>
           </a:p>
@@ -3084,8 +3084,9 @@
             <a:r>
               <a:rPr lang="en-GB" dirty="0" err="1">
                 <a:solidFill>
-                  <a:schemeClr val="hlink"/>
-                </a:solidFill>
+                  <a:srgbClr val="00B050"/>
+                </a:solidFill>
+                <a:latin typeface="APL385 Unicode" panose="020B0709000202000203" pitchFamily="49" charset="0"/>
               </a:rPr>
               <a:t>plusTax</a:t>
             </a:r>
@@ -3097,10 +3098,11 @@
               <a:rPr lang="en-GB" dirty="0"/>
             </a:br>
             <a:r>
-              <a:rPr lang="en-GB" i="1" dirty="0">
-                <a:solidFill>
-                  <a:srgbClr val="928ABD"/>
-                </a:solidFill>
+              <a:rPr lang="en-GB" dirty="0">
+                <a:solidFill>
+                  <a:srgbClr val="FF6600"/>
+                </a:solidFill>
+                <a:latin typeface="APL385 Unicode" panose="020B0709000202000203" pitchFamily="49" charset="0"/>
               </a:rPr>
               <a:t>price</a:t>
             </a:r>
@@ -3109,10 +3111,11 @@
               <a:t> on the left and </a:t>
             </a:r>
             <a:r>
-              <a:rPr lang="en-GB" i="1" dirty="0">
-                <a:solidFill>
-                  <a:schemeClr val="folHlink"/>
-                </a:solidFill>
+              <a:rPr lang="en-GB" dirty="0">
+                <a:solidFill>
+                  <a:srgbClr val="FF6600"/>
+                </a:solidFill>
+                <a:latin typeface="APL385 Unicode" panose="020B0709000202000203" pitchFamily="49" charset="0"/>
               </a:rPr>
               <a:t>tax</a:t>
             </a:r>
@@ -3128,10 +3131,11 @@
               <a:t>and returns the value in </a:t>
             </a:r>
             <a:r>
-              <a:rPr lang="en-GB" i="1" dirty="0">
-                <a:solidFill>
-                  <a:schemeClr val="folHlink"/>
-                </a:solidFill>
+              <a:rPr lang="en-GB" dirty="0">
+                <a:solidFill>
+                  <a:srgbClr val="00B0F0"/>
+                </a:solidFill>
+                <a:latin typeface="APL385 Unicode" panose="020B0709000202000203" pitchFamily="49" charset="0"/>
               </a:rPr>
               <a:t>amount</a:t>
             </a:r>
@@ -3294,8 +3298,9 @@
             <a:r>
               <a:rPr lang="en-GB" dirty="0" err="1">
                 <a:solidFill>
-                  <a:schemeClr val="hlink"/>
-                </a:solidFill>
+                  <a:srgbClr val="00B050"/>
+                </a:solidFill>
+                <a:latin typeface="APL385 Unicode" panose="020B0709000202000203" pitchFamily="49" charset="0"/>
               </a:rPr>
               <a:t>plusTax</a:t>
             </a:r>
@@ -3307,10 +3312,11 @@
               <a:rPr lang="en-GB" dirty="0"/>
             </a:br>
             <a:r>
-              <a:rPr lang="en-GB" i="1" dirty="0">
-                <a:solidFill>
-                  <a:srgbClr val="928ABD"/>
-                </a:solidFill>
+              <a:rPr lang="en-GB" dirty="0">
+                <a:solidFill>
+                  <a:srgbClr val="FF6600"/>
+                </a:solidFill>
+                <a:latin typeface="APL385 Unicode" panose="020B0709000202000203" pitchFamily="49" charset="0"/>
               </a:rPr>
               <a:t>price</a:t>
             </a:r>
@@ -3319,10 +3325,11 @@
               <a:t> on the left and </a:t>
             </a:r>
             <a:r>
-              <a:rPr lang="en-GB" i="1" dirty="0">
-                <a:solidFill>
-                  <a:schemeClr val="folHlink"/>
-                </a:solidFill>
+              <a:rPr lang="en-GB" dirty="0">
+                <a:solidFill>
+                  <a:srgbClr val="FF6600"/>
+                </a:solidFill>
+                <a:latin typeface="APL385 Unicode" panose="020B0709000202000203" pitchFamily="49" charset="0"/>
               </a:rPr>
               <a:t>tax</a:t>
             </a:r>
@@ -3338,10 +3345,11 @@
               <a:t>and returns the value in </a:t>
             </a:r>
             <a:r>
-              <a:rPr lang="en-GB" i="1" dirty="0">
-                <a:solidFill>
-                  <a:schemeClr val="folHlink"/>
-                </a:solidFill>
+              <a:rPr lang="en-GB" dirty="0">
+                <a:solidFill>
+                  <a:srgbClr val="00B0F0"/>
+                </a:solidFill>
+                <a:latin typeface="APL385 Unicode" panose="020B0709000202000203" pitchFamily="49" charset="0"/>
               </a:rPr>
               <a:t>amount</a:t>
             </a:r>
@@ -3914,7 +3922,7 @@
                 </a:solidFill>
                 <a:latin typeface="APL385 Unicode" panose="020B0709000202000203" pitchFamily="49" charset="0"/>
               </a:rPr>
-              <a:t>PlusTax</a:t>
+              <a:t>plusTax</a:t>
             </a:r>
             <a:r>
               <a:rPr lang="fr-FR" sz="2100" dirty="0">
@@ -6063,32 +6071,38 @@
                 </a:solidFill>
                 <a:latin typeface="APL385 Unicode" panose="020B0709000202000203" pitchFamily="49" charset="0"/>
               </a:rPr>
+              <a:t>2×seven</a:t>
+            </a:r>
+          </a:p>
+          <a:p>
+            <a:r>
+              <a:rPr lang="en-GB" dirty="0">
+                <a:latin typeface="APL385 Unicode" panose="020B0709000202000203" pitchFamily="49" charset="0"/>
+              </a:rPr>
+              <a:t>14</a:t>
+            </a:r>
+            <a:endParaRPr lang="en-GB" dirty="0">
+              <a:solidFill>
+                <a:srgbClr val="00B050"/>
+              </a:solidFill>
+              <a:latin typeface="APL385 Unicode" panose="020B0709000202000203" pitchFamily="49" charset="0"/>
+            </a:endParaRPr>
+          </a:p>
+          <a:p>
+            <a:r>
+              <a:rPr lang="en-GB" dirty="0">
+                <a:latin typeface="APL385 Unicode" panose="020B0709000202000203" pitchFamily="49" charset="0"/>
+              </a:rPr>
+              <a:t>      </a:t>
+            </a:r>
+            <a:r>
+              <a:rPr lang="en-GB" dirty="0">
+                <a:solidFill>
+                  <a:srgbClr val="00B050"/>
+                </a:solidFill>
+                <a:latin typeface="APL385 Unicode" panose="020B0709000202000203" pitchFamily="49" charset="0"/>
+              </a:rPr>
               <a:t>2×3+4</a:t>
-            </a:r>
-          </a:p>
-          <a:p>
-            <a:r>
-              <a:rPr lang="en-GB" dirty="0">
-                <a:latin typeface="APL385 Unicode" panose="020B0709000202000203" pitchFamily="49" charset="0"/>
-              </a:rPr>
-              <a:t>14</a:t>
-            </a:r>
-          </a:p>
-          <a:p>
-            <a:r>
-              <a:rPr lang="en-GB" dirty="0">
-                <a:latin typeface="APL385 Unicode" panose="020B0709000202000203" pitchFamily="49" charset="0"/>
-              </a:rPr>
-              <a:t>      </a:t>
-            </a:r>
-            <a:r>
-              <a:rPr lang="en-GB" dirty="0">
-                <a:solidFill>
-                  <a:srgbClr val="00B050"/>
-                </a:solidFill>
-                <a:latin typeface="APL385 Unicode" panose="020B0709000202000203" pitchFamily="49" charset="0"/>
-              </a:rPr>
-              <a:t>2×seven</a:t>
             </a:r>
           </a:p>
           <a:p>
@@ -6211,33 +6225,15 @@
                                   </p:childTnLst>
                                 </p:cTn>
                               </p:par>
-                            </p:childTnLst>
-                          </p:cTn>
-                        </p:par>
-                      </p:childTnLst>
-                    </p:cTn>
-                  </p:par>
-                  <p:par>
-                    <p:cTn id="11" fill="hold">
-                      <p:stCondLst>
-                        <p:cond delay="indefinite"/>
-                      </p:stCondLst>
-                      <p:childTnLst>
-                        <p:par>
-                          <p:cTn id="12" fill="hold">
-                            <p:stCondLst>
-                              <p:cond delay="0"/>
-                            </p:stCondLst>
-                            <p:childTnLst>
                               <p:par>
-                                <p:cTn id="13" presetID="1" presetClass="entr" presetSubtype="0" fill="hold" nodeType="clickEffect">
+                                <p:cTn id="11" presetID="1" presetClass="entr" presetSubtype="0" fill="hold" nodeType="withEffect">
                                   <p:stCondLst>
                                     <p:cond delay="0"/>
                                   </p:stCondLst>
                                   <p:childTnLst>
                                     <p:set>
                                       <p:cBhvr>
-                                        <p:cTn id="14" dur="1" fill="hold">
+                                        <p:cTn id="12" dur="1" fill="hold">
                                           <p:stCondLst>
                                             <p:cond delay="0"/>
                                           </p:stCondLst>
@@ -6267,26 +6263,26 @@
                     </p:cTn>
                   </p:par>
                   <p:par>
-                    <p:cTn id="15" fill="hold">
+                    <p:cTn id="13" fill="hold">
                       <p:stCondLst>
                         <p:cond delay="indefinite"/>
                       </p:stCondLst>
                       <p:childTnLst>
                         <p:par>
-                          <p:cTn id="16" fill="hold">
+                          <p:cTn id="14" fill="hold">
                             <p:stCondLst>
                               <p:cond delay="0"/>
                             </p:stCondLst>
                             <p:childTnLst>
                               <p:par>
-                                <p:cTn id="17" presetID="1" presetClass="entr" presetSubtype="0" fill="hold" nodeType="clickEffect">
+                                <p:cTn id="15" presetID="1" presetClass="entr" presetSubtype="0" fill="hold" nodeType="clickEffect">
                                   <p:stCondLst>
                                     <p:cond delay="0"/>
                                   </p:stCondLst>
                                   <p:childTnLst>
                                     <p:set>
                                       <p:cBhvr>
-                                        <p:cTn id="18" dur="1" fill="hold">
+                                        <p:cTn id="16" dur="1" fill="hold">
                                           <p:stCondLst>
                                             <p:cond delay="0"/>
                                           </p:stCondLst>
@@ -6316,19 +6312,50 @@
                     </p:cTn>
                   </p:par>
                   <p:par>
-                    <p:cTn id="19" fill="hold">
+                    <p:cTn id="17" fill="hold">
                       <p:stCondLst>
                         <p:cond delay="indefinite"/>
                       </p:stCondLst>
                       <p:childTnLst>
                         <p:par>
-                          <p:cTn id="20" fill="hold">
+                          <p:cTn id="18" fill="hold">
                             <p:stCondLst>
                               <p:cond delay="0"/>
                             </p:stCondLst>
                             <p:childTnLst>
                               <p:par>
-                                <p:cTn id="21" presetID="1" presetClass="entr" presetSubtype="0" fill="hold" nodeType="clickEffect">
+                                <p:cTn id="19" presetID="1" presetClass="entr" presetSubtype="0" fill="hold" nodeType="clickEffect">
+                                  <p:stCondLst>
+                                    <p:cond delay="0"/>
+                                  </p:stCondLst>
+                                  <p:childTnLst>
+                                    <p:set>
+                                      <p:cBhvr>
+                                        <p:cTn id="20" dur="1" fill="hold">
+                                          <p:stCondLst>
+                                            <p:cond delay="0"/>
+                                          </p:stCondLst>
+                                        </p:cTn>
+                                        <p:tgtEl>
+                                          <p:spTgt spid="5">
+                                            <p:txEl>
+                                              <p:pRg st="3" end="3"/>
+                                            </p:txEl>
+                                          </p:spTgt>
+                                        </p:tgtEl>
+                                        <p:attrNameLst>
+                                          <p:attrName>style.visibility</p:attrName>
+                                        </p:attrNameLst>
+                                      </p:cBhvr>
+                                      <p:to>
+                                        <p:strVal val="visible"/>
+                                      </p:to>
+                                    </p:set>
+                                  </p:childTnLst>
+                                </p:cTn>
+                              </p:par>
+                              <p:par>
+                                <p:cTn id="21" presetID="1" presetClass="entr" presetSubtype="0" fill="hold" nodeType="withEffect">
                                   <p:stCondLst>
                                     <p:cond delay="0"/>
                                   </p:stCondLst>
@@ -6343,7 +6370,7 @@
                                         <p:tgtEl>
                                           <p:spTgt spid="5">
                                             <p:txEl>
-                                              <p:pRg st="3" end="3"/>
+                                              <p:pRg st="4" end="4"/>
                                             </p:txEl>
                                           </p:spTgt>
                                         </p:tgtEl>
@@ -6392,55 +6419,6 @@
                                         <p:tgtEl>
                                           <p:spTgt spid="5">
                                             <p:txEl>
-                                              <p:pRg st="4" end="4"/>
-                                            </p:txEl>
-                                          </p:spTgt>
-                                        </p:tgtEl>
-                                        <p:attrNameLst>
-                                          <p:attrName>style.visibility</p:attrName>
-                                        </p:attrNameLst>
-                                      </p:cBhvr>
-                                      <p:to>
-                                        <p:strVal val="visible"/>
-                                      </p:to>
-                                    </p:set>
-                                  </p:childTnLst>
-                                </p:cTn>
-                              </p:par>
-                            </p:childTnLst>
-                          </p:cTn>
-                        </p:par>
-                      </p:childTnLst>
-                    </p:cTn>
-                  </p:par>
-                  <p:par>
-                    <p:cTn id="27" fill="hold">
-                      <p:stCondLst>
-                        <p:cond delay="indefinite"/>
-                      </p:stCondLst>
-                      <p:childTnLst>
-                        <p:par>
-                          <p:cTn id="28" fill="hold">
-                            <p:stCondLst>
-                              <p:cond delay="0"/>
-                            </p:stCondLst>
-                            <p:childTnLst>
-                              <p:par>
-                                <p:cTn id="29" presetID="1" presetClass="entr" presetSubtype="0" fill="hold" nodeType="clickEffect">
-                                  <p:stCondLst>
-                                    <p:cond delay="0"/>
-                                  </p:stCondLst>
-                                  <p:childTnLst>
-                                    <p:set>
-                                      <p:cBhvr>
-                                        <p:cTn id="30" dur="1" fill="hold">
-                                          <p:stCondLst>
-                                            <p:cond delay="0"/>
-                                          </p:stCondLst>
-                                        </p:cTn>
-                                        <p:tgtEl>
-                                          <p:spTgt spid="5">
-                                            <p:txEl>
                                               <p:pRg st="5" end="5"/>
                                             </p:txEl>
                                           </p:spTgt>
@@ -6456,33 +6434,15 @@
                                   </p:childTnLst>
                                 </p:cTn>
                               </p:par>
-                            </p:childTnLst>
-                          </p:cTn>
-                        </p:par>
-                      </p:childTnLst>
-                    </p:cTn>
-                  </p:par>
-                  <p:par>
-                    <p:cTn id="31" fill="hold">
-                      <p:stCondLst>
-                        <p:cond delay="indefinite"/>
-                      </p:stCondLst>
-                      <p:childTnLst>
-                        <p:par>
-                          <p:cTn id="32" fill="hold">
-                            <p:stCondLst>
-                              <p:cond delay="0"/>
-                            </p:stCondLst>
-                            <p:childTnLst>
                               <p:par>
-                                <p:cTn id="33" presetID="1" presetClass="entr" presetSubtype="0" fill="hold" nodeType="clickEffect">
+                                <p:cTn id="27" presetID="1" presetClass="entr" presetSubtype="0" fill="hold" nodeType="withEffect">
                                   <p:stCondLst>
                                     <p:cond delay="0"/>
                                   </p:stCondLst>
                                   <p:childTnLst>
                                     <p:set>
                                       <p:cBhvr>
-                                        <p:cTn id="34" dur="1" fill="hold">
+                                        <p:cTn id="28" dur="1" fill="hold">
                                           <p:stCondLst>
                                             <p:cond delay="0"/>
                                           </p:stCondLst>
@@ -6512,26 +6472,26 @@
                     </p:cTn>
                   </p:par>
                   <p:par>
-                    <p:cTn id="35" fill="hold">
+                    <p:cTn id="29" fill="hold">
                       <p:stCondLst>
                         <p:cond delay="indefinite"/>
                       </p:stCondLst>
                       <p:childTnLst>
                         <p:par>
-                          <p:cTn id="36" fill="hold">
+                          <p:cTn id="30" fill="hold">
                             <p:stCondLst>
                               <p:cond delay="0"/>
                             </p:stCondLst>
                             <p:childTnLst>
                               <p:par>
-                                <p:cTn id="37" presetID="1" presetClass="entr" presetSubtype="0" fill="hold" nodeType="clickEffect">
+                                <p:cTn id="31" presetID="1" presetClass="entr" presetSubtype="0" fill="hold" nodeType="clickEffect">
                                   <p:stCondLst>
                                     <p:cond delay="0"/>
                                   </p:stCondLst>
                                   <p:childTnLst>
                                     <p:set>
                                       <p:cBhvr>
-                                        <p:cTn id="38" dur="1" fill="hold">
+                                        <p:cTn id="32" dur="1" fill="hold">
                                           <p:stCondLst>
                                             <p:cond delay="0"/>
                                           </p:stCondLst>
@@ -6561,26 +6521,26 @@
                     </p:cTn>
                   </p:par>
                   <p:par>
-                    <p:cTn id="39" fill="hold">
+                    <p:cTn id="33" fill="hold">
                       <p:stCondLst>
                         <p:cond delay="indefinite"/>
                       </p:stCondLst>
                       <p:childTnLst>
                         <p:par>
-                          <p:cTn id="40" fill="hold">
+                          <p:cTn id="34" fill="hold">
                             <p:stCondLst>
                               <p:cond delay="0"/>
                             </p:stCondLst>
                             <p:childTnLst>
                               <p:par>
-                                <p:cTn id="41" presetID="1" presetClass="entr" presetSubtype="0" fill="hold" nodeType="clickEffect">
+                                <p:cTn id="35" presetID="1" presetClass="entr" presetSubtype="0" fill="hold" nodeType="clickEffect">
                                   <p:stCondLst>
                                     <p:cond delay="0"/>
                                   </p:stCondLst>
                                   <p:childTnLst>
                                     <p:set>
                                       <p:cBhvr>
-                                        <p:cTn id="42" dur="1" fill="hold">
+                                        <p:cTn id="36" dur="1" fill="hold">
                                           <p:stCondLst>
                                             <p:cond delay="0"/>
                                           </p:stCondLst>
@@ -6610,26 +6570,26 @@
                     </p:cTn>
                   </p:par>
                   <p:par>
-                    <p:cTn id="43" fill="hold">
+                    <p:cTn id="37" fill="hold">
                       <p:stCondLst>
                         <p:cond delay="indefinite"/>
                       </p:stCondLst>
                       <p:childTnLst>
                         <p:par>
-                          <p:cTn id="44" fill="hold">
+                          <p:cTn id="38" fill="hold">
                             <p:stCondLst>
                               <p:cond delay="0"/>
                             </p:stCondLst>
                             <p:childTnLst>
                               <p:par>
-                                <p:cTn id="45" presetID="1" presetClass="entr" presetSubtype="0" fill="hold" nodeType="clickEffect">
+                                <p:cTn id="39" presetID="1" presetClass="entr" presetSubtype="0" fill="hold" nodeType="clickEffect">
                                   <p:stCondLst>
                                     <p:cond delay="0"/>
                                   </p:stCondLst>
                                   <p:childTnLst>
                                     <p:set>
                                       <p:cBhvr>
-                                        <p:cTn id="46" dur="1" fill="hold">
+                                        <p:cTn id="40" dur="1" fill="hold">
                                           <p:stCondLst>
                                             <p:cond delay="0"/>
                                           </p:stCondLst>
@@ -25304,8 +25264,9 @@
             <a:r>
               <a:rPr lang="en-GB" dirty="0" err="1">
                 <a:solidFill>
-                  <a:schemeClr val="hlink"/>
-                </a:solidFill>
+                  <a:srgbClr val="00B050"/>
+                </a:solidFill>
+                <a:latin typeface="APL385 Unicode" panose="020B0709000202000203" pitchFamily="49" charset="0"/>
               </a:rPr>
               <a:t>plusTax</a:t>
             </a:r>
@@ -25317,10 +25278,11 @@
               <a:rPr lang="en-GB" dirty="0"/>
             </a:br>
             <a:r>
-              <a:rPr lang="en-GB" i="1" dirty="0">
-                <a:solidFill>
-                  <a:srgbClr val="928ABD"/>
-                </a:solidFill>
+              <a:rPr lang="en-GB" dirty="0">
+                <a:solidFill>
+                  <a:srgbClr val="FF6600"/>
+                </a:solidFill>
+                <a:latin typeface="APL385 Unicode" panose="020B0709000202000203" pitchFamily="49" charset="0"/>
               </a:rPr>
               <a:t>price</a:t>
             </a:r>
@@ -25329,10 +25291,11 @@
               <a:t> on the left and </a:t>
             </a:r>
             <a:r>
-              <a:rPr lang="en-GB" i="1" dirty="0">
-                <a:solidFill>
-                  <a:schemeClr val="folHlink"/>
-                </a:solidFill>
+              <a:rPr lang="en-GB" dirty="0">
+                <a:solidFill>
+                  <a:srgbClr val="FF6600"/>
+                </a:solidFill>
+                <a:latin typeface="APL385 Unicode" panose="020B0709000202000203" pitchFamily="49" charset="0"/>
               </a:rPr>
               <a:t>tax</a:t>
             </a:r>
@@ -25348,10 +25311,11 @@
               <a:t>and returns the value in </a:t>
             </a:r>
             <a:r>
-              <a:rPr lang="en-GB" i="1" dirty="0">
-                <a:solidFill>
-                  <a:schemeClr val="folHlink"/>
-                </a:solidFill>
+              <a:rPr lang="en-GB" dirty="0">
+                <a:solidFill>
+                  <a:srgbClr val="00B0F0"/>
+                </a:solidFill>
+                <a:latin typeface="APL385 Unicode" panose="020B0709000202000203" pitchFamily="49" charset="0"/>
               </a:rPr>
               <a:t>amount</a:t>
             </a:r>
